--- a/docs/DEFENCE_PRESENTATION.pptx
+++ b/docs/DEFENCE_PRESENTATION.pptx
@@ -42,7 +42,7 @@
     <p:sldId id="290" r:id="rId42"/>
     <p:sldId id="291" r:id="rId43"/>
   </p:sldIdLst>
-  <p:sldSz cx="9144000" cy="5143500" type="screen4x3"/>
+  <p:sldSz cx="9144000" cy="5143500"/>
   <p:notesSz cx="6858000" cy="9144000"/>
   <p:defaultTextStyle>
     <a:defPPr>
@@ -10233,8 +10233,8 @@
         </p:nvCxnSpPr>
         <p:spPr>
           <a:xfrm>
-            <a:off x="1600200" y="1792224.0"/>
-            <a:ext cx="155448" cy="0.0"/>
+            <a:off x="1600200" y="1792224"/>
+            <a:ext cx="155448" cy="0"/>
           </a:xfrm>
           <a:prstGeom prst="line">
             <a:avLst/>
@@ -10336,8 +10336,8 @@
         </p:nvCxnSpPr>
         <p:spPr>
           <a:xfrm>
-            <a:off x="2990088" y="1792224.0"/>
-            <a:ext cx="155448" cy="0.0"/>
+            <a:off x="2990088" y="1792224"/>
+            <a:ext cx="155448" cy="0"/>
           </a:xfrm>
           <a:prstGeom prst="line">
             <a:avLst/>
@@ -10439,8 +10439,8 @@
         </p:nvCxnSpPr>
         <p:spPr>
           <a:xfrm>
-            <a:off x="4379976" y="1792224.0"/>
-            <a:ext cx="155448" cy="0.0"/>
+            <a:off x="4379976" y="1792224"/>
+            <a:ext cx="155448" cy="0"/>
           </a:xfrm>
           <a:prstGeom prst="line">
             <a:avLst/>
@@ -10542,8 +10542,8 @@
         </p:nvCxnSpPr>
         <p:spPr>
           <a:xfrm>
-            <a:off x="5769864" y="1792224.0"/>
-            <a:ext cx="155448" cy="0.0"/>
+            <a:off x="5769864" y="1792224"/>
+            <a:ext cx="155448" cy="0"/>
           </a:xfrm>
           <a:prstGeom prst="line">
             <a:avLst/>
@@ -10645,8 +10645,8 @@
         </p:nvCxnSpPr>
         <p:spPr>
           <a:xfrm>
-            <a:off x="7159752" y="1792224.0"/>
-            <a:ext cx="155448" cy="0.0"/>
+            <a:off x="7159752" y="1792224"/>
+            <a:ext cx="155448" cy="0"/>
           </a:xfrm>
           <a:prstGeom prst="line">
             <a:avLst/>
@@ -15761,7 +15761,7 @@
         <p:spPr>
           <a:xfrm flipV="1">
             <a:off x="4654296" y="3493008"/>
-            <a:ext cx="1586484.0" cy="548640"/>
+            <a:ext cx="1586484" cy="548640"/>
           </a:xfrm>
           <a:prstGeom prst="line">
             <a:avLst/>
@@ -15917,8 +15917,8 @@
         </p:nvCxnSpPr>
         <p:spPr>
           <a:xfrm flipH="1" flipV="1">
-            <a:off x="6240780.0" y="3493008"/>
-            <a:ext cx="32004.0" cy="548640"/>
+            <a:off x="6240780" y="3493008"/>
+            <a:ext cx="32004" cy="548640"/>
           </a:xfrm>
           <a:prstGeom prst="line">
             <a:avLst/>
@@ -16074,8 +16074,8 @@
         </p:nvCxnSpPr>
         <p:spPr>
           <a:xfrm flipH="1" flipV="1">
-            <a:off x="6240780.0" y="3493008"/>
-            <a:ext cx="1650492.0" cy="548640"/>
+            <a:off x="6240780" y="3493008"/>
+            <a:ext cx="1650492" cy="548640"/>
           </a:xfrm>
           <a:prstGeom prst="line">
             <a:avLst/>

--- a/docs/DEFENCE_PRESENTATION.pptx
+++ b/docs/DEFENCE_PRESENTATION.pptx
@@ -970,7 +970,7 @@
           <a:lstStyle/>
           <a:p>
             <a:r>
-              <a:t>This is the map for the next twelve slides. Say: 'the design is not a proposal — all of it is built and measured.'</a:t>
+              <a:t>This is the map for the next twelve slides. Say: 'the design is not a proposal; all of it is built and measured.'</a:t>
             </a:r>
           </a:p>
         </p:txBody>
@@ -1028,7 +1028,7 @@
           <a:lstStyle/>
           <a:p>
             <a:r>
-              <a:t>Standard Level-0 DFD: exactly one process, external entities as rectangles, labelled data flows, and no internal data stores at this level. Point out that the broker is an external entity — that is what makes it swappable.</a:t>
+              <a:t>Standard Level-0 DFD: exactly one process, external entities as rectangles, labelled data flows, and no internal data stores at this level. Point out that the broker is an external entity; that is what makes it swappable.</a:t>
             </a:r>
           </a:p>
         </p:txBody>
@@ -1376,7 +1376,7 @@
           <a:lstStyle/>
           <a:p>
             <a:r>
-              <a:t>These are genuine numbers from a dry run, not invented. If asked, the selectivity (1.3% of candles) is deliberate — see Barber &amp; Odean.</a:t>
+              <a:t>These are genuine numbers from a dry run, not invented. If asked, the selectivity (1.3% of candles) is deliberate; see Barber &amp; Odean.</a:t>
             </a:r>
           </a:p>
         </p:txBody>
@@ -1434,7 +1434,7 @@
           <a:lstStyle/>
           <a:p>
             <a:r>
-              <a:t>Keep this to fifteen seconds. Point out that the second column is where the evidence lives — design, results, and the live product.</a:t>
+              <a:t>Keep this to fifteen seconds. Point out that the second column is where the evidence lives: design, results, and the live product.</a:t>
             </a:r>
           </a:p>
         </p:txBody>
@@ -1550,7 +1550,7 @@
           <a:lstStyle/>
           <a:p>
             <a:r>
-              <a:t>Do not hide the two FAILs — lead with them if necessary. A panel trusts a candidate who reports failures precisely far more than one whose every number passes.</a:t>
+              <a:t>Do not hide the two FAILs; lead with them if necessary. A panel trusts a candidate who reports failures precisely far more than one whose every number passes.</a:t>
             </a:r>
           </a:p>
         </p:txBody>
@@ -1724,7 +1724,7 @@
           <a:lstStyle/>
           <a:p>
             <a:r>
-              <a:t>This is your strongest single slide for demonstrating research method: a popular technique, implemented faithfully, measured, and rejected on evidence — with an explanation of WHY it failed.</a:t>
+              <a:t>This is your strongest single slide for demonstrating research method: a popular technique, implemented faithfully, measured, and rejected on evidence, with an explanation of WHY it failed.</a:t>
             </a:r>
           </a:p>
         </p:txBody>
@@ -1840,7 +1840,7 @@
           <a:lstStyle/>
           <a:p>
             <a:r>
-              <a:t>Say 'negative result' with confidence. You proved a published approach does not work and documented why — that is a contribution.</a:t>
+              <a:t>Say 'negative result' with confidence. You proved a published approach does not work and documented why; that is a contribution.</a:t>
             </a:r>
           </a:p>
         </p:txBody>
@@ -1898,7 +1898,7 @@
           <a:lstStyle/>
           <a:p>
             <a:r>
-              <a:t>Be precise about the direction of transfer: the ARCHITECTURE and the Wine finding transferred. Gadel contains no machine learning and has never run this project's model — do not claim its trading results as yours.</a:t>
+              <a:t>Be precise about the direction of transfer: the ARCHITECTURE and the Wine finding transferred. Gadel contains no machine learning and has never run this project's model; do not claim its trading results as yours.</a:t>
             </a:r>
           </a:p>
         </p:txBody>
@@ -2014,7 +2014,7 @@
           <a:lstStyle/>
           <a:p>
             <a:r>
-              <a:t>Redaction is not optional — these are real accounts. Black boxes over account numbers, balances, server hostnames and any token.</a:t>
+              <a:t>Redaction is not optional: these are real accounts. Black boxes over account numbers, balances, server hostnames and any token.</a:t>
             </a:r>
           </a:p>
         </p:txBody>
@@ -2130,7 +2130,7 @@
           <a:lstStyle/>
           <a:p>
             <a:r>
-              <a:t>Say 'expressed interest', never 'customers' or 'willing to pay' — a waiting-list signup is not a purchase. Overstating this is the one thing that could damage your credibility on an otherwise careful project.</a:t>
+              <a:t>Say 'expressed interest', never 'customers' or 'willing to pay': a waiting-list signup is not a purchase. Overstating this is the one thing that could damage your credibility on an otherwise careful project.</a:t>
             </a:r>
           </a:p>
         </p:txBody>
@@ -2478,7 +2478,7 @@
           <a:lstStyle/>
           <a:p>
             <a:r>
-              <a:t>Have docs/DEFENCE_GUIDE.md open on a second screen — it holds prepared answers to the twelve most likely questions.</a:t>
+              <a:t>Have docs/DEFENCE_GUIDE.md open on a second screen; it holds prepared answers to the twelve most likely questions.</a:t>
             </a:r>
           </a:p>
         </p:txBody>
@@ -2710,7 +2710,7 @@
           <a:lstStyle/>
           <a:p>
             <a:r>
-              <a:t>The 'Comment' column is the important one — it shows you engaged with each paper and measured its claim rather than citing it decoratively.</a:t>
+              <a:t>The 'Comment' column is the important one; it shows you engaged with each paper and measured its claim rather than citing it decoratively.</a:t>
             </a:r>
           </a:p>
         </p:txBody>
@@ -17301,7 +17301,7 @@
                 </a:solidFill>
                 <a:latin typeface="Montserrat"/>
               </a:rPr>
-              <a:t>•  Removes emotional and fatigue-driven error from execution — the dominant documented cause of retail losses.</a:t>
+              <a:t>•  Removes emotional and fatigue-driven error from execution, the dominant documented cause of retail losses.</a:t>
             </a:r>
           </a:p>
           <a:p>
@@ -17349,7 +17349,7 @@
                 </a:solidFill>
                 <a:latin typeface="Montserrat"/>
               </a:rPr>
-              <a:t>•  The evaluation method is itself a contribution — it is reproducible, costed, and reports negative results, which is uncommon in this literature.</a:t>
+              <a:t>•  The evaluation method is itself a contribution; it is reproducible, costed, and reports negative results, which is uncommon in this literature.</a:t>
             </a:r>
           </a:p>
           <a:p>
@@ -17543,7 +17543,7 @@
                 </a:solidFill>
                 <a:latin typeface="Montserrat"/>
               </a:rPr>
-              <a:t>–  Two currency pairs — EUR/USD and GBP/USD — on the 1-hour timeframe.</a:t>
+              <a:t>–  Two currency pairs, EUR/USD and GBP/USD, on the 1-hour timeframe.</a:t>
             </a:r>
           </a:p>
           <a:p>
@@ -18404,7 +18404,7 @@
                 </a:solidFill>
                 <a:latin typeface="Montserrat"/>
               </a:rPr>
-              <a:t>Design Specification — Context Diagram</a:t>
+              <a:t>Design Specification: Context Diagram</a:t>
             </a:r>
           </a:p>
         </p:txBody>
@@ -19347,7 +19347,7 @@
                 </a:solidFill>
                 <a:latin typeface="Montserrat"/>
               </a:rPr>
-              <a:t>Design Specification — System Architecture</a:t>
+              <a:t>Design Specification: System Architecture</a:t>
             </a:r>
           </a:p>
         </p:txBody>
@@ -20860,7 +20860,7 @@
                 </a:solidFill>
                 <a:latin typeface="Montserrat"/>
               </a:rPr>
-              <a:t>Design Specification — Block Diagram</a:t>
+              <a:t>Design Specification: Block Diagram</a:t>
             </a:r>
           </a:p>
         </p:txBody>
@@ -21885,7 +21885,7 @@
                 </a:solidFill>
                 <a:latin typeface="Montserrat"/>
               </a:rPr>
-              <a:t>Backtester  —  replays history, charges spread + slippage</a:t>
+              <a:t>Backtester:  replays history, charges spread + slippage</a:t>
             </a:r>
           </a:p>
         </p:txBody>
@@ -22009,7 +22009,7 @@
                 </a:solidFill>
                 <a:latin typeface="Montserrat"/>
               </a:rPr>
-              <a:t>Design Specification — Use Case Diagram</a:t>
+              <a:t>Design Specification: Use Case Diagram</a:t>
             </a:r>
           </a:p>
         </p:txBody>
@@ -23875,7 +23875,7 @@
                 </a:solidFill>
                 <a:latin typeface="Montserrat"/>
               </a:rPr>
-              <a:t>Design Specification — Activity Diagram</a:t>
+              <a:t>Design Specification: Activity Diagram</a:t>
             </a:r>
           </a:p>
         </p:txBody>
@@ -25143,7 +25143,7 @@
                 </a:solidFill>
                 <a:latin typeface="Montserrat"/>
               </a:rPr>
-              <a:t>Design Specification — Class Diagram</a:t>
+              <a:t>Design Specification: Class Diagram</a:t>
             </a:r>
           </a:p>
         </p:txBody>
@@ -27170,7 +27170,7 @@
                 </a:solidFill>
                 <a:latin typeface="Montserrat"/>
               </a:rPr>
-              <a:t>Figure 6: Class Diagram. The engine depends only on the abstract ExecutionHandler — never on a concrete broker.</a:t>
+              <a:t>Figure 6: Class Diagram. The engine depends only on the abstract ExecutionHandler, never on a concrete broker.</a:t>
             </a:r>
           </a:p>
         </p:txBody>
@@ -27465,7 +27465,7 @@
                           </a:solidFill>
                           <a:latin typeface="Montserrat"/>
                         </a:rPr>
-                        <a:t>Rule gate — Volume Z-Score</a:t>
+                        <a:t>Rule gate: Volume Z-Score</a:t>
                       </a:r>
                     </a:p>
                   </a:txBody>
@@ -27559,7 +27559,7 @@
                           </a:solidFill>
                           <a:latin typeface="Montserrat"/>
                         </a:rPr>
-                        <a:t>ML gate — P(bullish)</a:t>
+                        <a:t>ML gate: P(bullish)</a:t>
                       </a:r>
                     </a:p>
                   </a:txBody>
@@ -27771,7 +27771,7 @@
                 </a:solidFill>
                 <a:latin typeface="Montserrat"/>
               </a:rPr>
-              <a:t>•  If either gate fails the system returns HOLD — and on roughly 98.7% of candles, that is exactly what happens.</a:t>
+              <a:t>•  If either gate fails the system returns HOLD, and on roughly 98.7% of candles, that is exactly what happens.</a:t>
             </a:r>
           </a:p>
           <a:p>
@@ -27819,7 +27819,7 @@
                 </a:solidFill>
                 <a:latin typeface="Montserrat"/>
               </a:rPr>
-              <a:t>•  Every decision — including every HOLD — is logged with its probability and Z-Score, which is what makes the system auditable.</a:t>
+              <a:t>•  Every decision, including every HOLD, is logged with its probability and Z-Score, which is what makes the system auditable.</a:t>
             </a:r>
           </a:p>
         </p:txBody>
@@ -28116,7 +28116,7 @@
                 </a:solidFill>
                 <a:latin typeface="Montserrat"/>
               </a:rPr>
-              <a:t> 8.   WORK DONE — DESIGN SPECIFICATION</a:t>
+              <a:t> 8.   WORK DONE: DESIGN SPECIFICATION</a:t>
             </a:r>
           </a:p>
           <a:p>
@@ -28132,7 +28132,7 @@
                 </a:solidFill>
                 <a:latin typeface="Montserrat"/>
               </a:rPr>
-              <a:t> 9.   WORK DONE — IMPLEMENTATION &amp; RESULTS</a:t>
+              <a:t> 9.   WORK DONE: IMPLEMENTATION &amp; RESULTS</a:t>
             </a:r>
           </a:p>
           <a:p>
@@ -28390,7 +28390,7 @@
                 </a:solidFill>
                 <a:latin typeface="Montserrat"/>
               </a:rPr>
-              <a:t>–  The first version asked the model 'will the next candle close higher?' — and it lost money on both pairs, because that question is not the one the strategy actually cares about.</a:t>
+              <a:t>–  The first version asked the model 'will the next candle close higher?', and it lost money on both pairs, because that question is not the one the strategy actually cares about.</a:t>
             </a:r>
           </a:p>
           <a:p>
@@ -28477,7 +28477,7 @@
                 </a:solidFill>
                 <a:latin typeface="Montserrat"/>
               </a:rPr>
-              <a:t>upper barrier — take-profit  →  class 1</a:t>
+              <a:t>upper barrier: take-profit  →  class 1</a:t>
             </a:r>
           </a:p>
         </p:txBody>
@@ -28532,7 +28532,7 @@
                 </a:solidFill>
                 <a:latin typeface="Montserrat"/>
               </a:rPr>
-              <a:t>lower barrier — stop-loss  →  class 0</a:t>
+              <a:t>lower barrier: stop-loss  →  class 0</a:t>
             </a:r>
           </a:p>
         </p:txBody>
@@ -28761,7 +28761,7 @@
                 </a:solidFill>
                 <a:latin typeface="Montserrat"/>
               </a:rPr>
-              <a:t>Results — Held-Out Test Set, Costs Included</a:t>
+              <a:t>Results: Held-Out Test Set, Costs Included</a:t>
             </a:r>
           </a:p>
         </p:txBody>
@@ -29120,7 +29120,7 @@
                           </a:solidFill>
                           <a:latin typeface="Montserrat"/>
                         </a:rPr>
-                        <a:t>—</a:t>
+                        <a:t>n/a</a:t>
                       </a:r>
                     </a:p>
                   </a:txBody>
@@ -29496,7 +29496,7 @@
                           </a:solidFill>
                           <a:latin typeface="Montserrat"/>
                         </a:rPr>
-                        <a:t>—</a:t>
+                        <a:t>n/a</a:t>
                       </a:r>
                     </a:p>
                   </a:txBody>
@@ -29590,7 +29590,7 @@
                           </a:solidFill>
                           <a:latin typeface="Montserrat"/>
                         </a:rPr>
-                        <a:t>—</a:t>
+                        <a:t>n/a</a:t>
                       </a:r>
                     </a:p>
                   </a:txBody>
@@ -29734,7 +29734,7 @@
                 </a:solidFill>
                 <a:latin typeface="Montserrat"/>
               </a:rPr>
-              <a:t>Results — How Much of This Is Actually the Model?</a:t>
+              <a:t>Results: How Much of This Is Actually the Model?</a:t>
             </a:r>
           </a:p>
         </p:txBody>
@@ -29907,7 +29907,7 @@
                 </a:solidFill>
                 <a:latin typeface="Montserrat"/>
               </a:rPr>
-              <a:t>–  Profit factor. Against every random-direction seed, the trained model wins on profit factor — the metric that measures whether the trades KEPT were better than the trades SKIPPED.</a:t>
+              <a:t>–  Profit factor. Against every random-direction seed, the trained model wins on profit factor, the metric that measures whether the trades KEPT were better than the trades SKIPPED.</a:t>
             </a:r>
           </a:p>
           <a:p>
@@ -29955,7 +29955,7 @@
                 </a:solidFill>
                 <a:latin typeface="Montserrat"/>
               </a:rPr>
-              <a:t>–  The training label is long-only with a 24-bar horizon, while live trades take both directions and are held to their barriers — a documented inconsistency.</a:t>
+              <a:t>–  The training label is long-only with a 24-bar horizon, while live trades take both directions and are held to their barriers, a documented inconsistency.</a:t>
             </a:r>
           </a:p>
           <a:p>
@@ -30024,7 +30024,7 @@
                 </a:solidFill>
                 <a:latin typeface="Montserrat"/>
               </a:rPr>
-              <a:t>Results — Six Measured Negative Results</a:t>
+              <a:t>Results: Six Measured Negative Results</a:t>
             </a:r>
           </a:p>
         </p:txBody>
@@ -30129,7 +30129,7 @@
                 </a:solidFill>
                 <a:latin typeface="Montserrat"/>
               </a:rPr>
-              <a:t>Each feature was added alone, retrained, and measured on both pairs. None improved both, so all are switched off — with the code kept.</a:t>
+              <a:t>Each feature was added alone, retrained, and measured on both pairs. None improved both, so all are switched off, with the code kept.</a:t>
             </a:r>
           </a:p>
         </p:txBody>
@@ -30359,7 +30359,7 @@
                           </a:solidFill>
                           <a:latin typeface="Montserrat"/>
                         </a:rPr>
-                        <a:t>Hurt badly — drawdown above 15%</a:t>
+                        <a:t>Hurt badly: drawdown above 15%</a:t>
                       </a:r>
                     </a:p>
                   </a:txBody>
@@ -30643,7 +30643,7 @@
                           </a:solidFill>
                           <a:latin typeface="Montserrat"/>
                         </a:rPr>
-                        <a:t>Helped GBP/USD only — 1 of 4 configurations</a:t>
+                        <a:t>Helped GBP/USD only: 1 of 4 configurations</a:t>
                       </a:r>
                     </a:p>
                   </a:txBody>
@@ -30741,7 +30741,7 @@
                 </a:solidFill>
                 <a:latin typeface="Montserrat"/>
               </a:rPr>
-              <a:t>Case Study — Order Blocks, Tested Properly</a:t>
+              <a:t>Case Study: Order Blocks, Tested Properly</a:t>
             </a:r>
           </a:p>
         </p:txBody>
@@ -31519,7 +31519,7 @@
                 </a:solidFill>
                 <a:latin typeface="Montserrat"/>
               </a:rPr>
-              <a:t>•  The model DID use them — the order-block features carry about 20% of total feature importance. This was not an ignored input.</a:t>
+              <a:t>•  The model DID use them; the order-block features carry about 20% of total feature importance. This was not an ignored input.</a:t>
             </a:r>
           </a:p>
           <a:p>
@@ -31588,7 +31588,7 @@
                 </a:solidFill>
                 <a:latin typeface="Montserrat"/>
               </a:rPr>
-              <a:t>Evidence — Backtest Run and Dashboard</a:t>
+              <a:t>Evidence: Backtest Run and Dashboard</a:t>
             </a:r>
           </a:p>
         </p:txBody>
@@ -32001,7 +32001,7 @@
                 </a:solidFill>
                 <a:latin typeface="Montserrat"/>
               </a:rPr>
-              <a:t>Deployment — A Documented Engineering Finding</a:t>
+              <a:t>Deployment: A Documented Engineering Finding</a:t>
             </a:r>
           </a:p>
         </p:txBody>
@@ -32126,7 +32126,7 @@
                 </a:solidFill>
                 <a:latin typeface="Montserrat"/>
               </a:rPr>
-              <a:t>–  It cannot work. MetaTrader's Python API fails to initialise under Wine with error -10005 (an inter-process communication timeout) — reproduced across three environments, including native x86 with no emulation, and including a byte-for-byte copy of a published working reference.</a:t>
+              <a:t>–  It cannot work. MetaTrader's Python API fails to initialise under Wine with error -10005 (an inter-process communication timeout), reproduced across three environments, including native x86 with no emulation, and including a byte-for-byte copy of a published working reference.</a:t>
             </a:r>
           </a:p>
           <a:p>
@@ -32190,7 +32190,7 @@
                 </a:solidFill>
                 <a:latin typeface="Montserrat"/>
               </a:rPr>
-              <a:t>–  It is a negative engineering result with a clear cause, a reproduction, and a working alternative — and it is exactly the kind of finding that saves the next person weeks.</a:t>
+              <a:t>–  It is a negative engineering result with a clear cause, a reproduction, and a working alternative, and it is exactly the kind of finding that saves the next person weeks.</a:t>
             </a:r>
           </a:p>
         </p:txBody>
@@ -33813,7 +33813,7 @@
                 </a:solidFill>
                 <a:latin typeface="Montserrat"/>
               </a:rPr>
-              <a:t>Shared (highlighted): the abstract execution interface and the RPC boundary — the two components this research designed and proved.</a:t>
+              <a:t>Shared (highlighted): the abstract execution interface and the RPC boundary, the two components this research designed and proved.</a:t>
             </a:r>
           </a:p>
         </p:txBody>
@@ -34097,7 +34097,7 @@
                 </a:solidFill>
                 <a:latin typeface="Montserrat"/>
               </a:rPr>
-              <a:t>•  Five defects in this project's live-order path that only real trading exposes — fill modes, thread affinity, magic numbers, lot rounding, whitespace in server names — all since fixed here.</a:t>
+              <a:t>•  Five defects in this project's live-order path that only real trading exposes: fill modes, thread affinity, magic numbers, lot rounding, whitespace in server names, and all have since been fixed here.</a:t>
             </a:r>
           </a:p>
         </p:txBody>
@@ -34191,7 +34191,7 @@
                 </a:solidFill>
                 <a:latin typeface="Montserrat"/>
               </a:rPr>
-              <a:t>•  Any trading claim in this report. It contains NO machine learning — verified by a repository-wide search.</a:t>
+              <a:t>•  Any trading claim in this report. It contains NO machine learning, verified by a repository-wide search.</a:t>
             </a:r>
           </a:p>
           <a:p>
@@ -34223,7 +34223,7 @@
                 </a:solidFill>
                 <a:latin typeface="Montserrat"/>
               </a:rPr>
-              <a:t>•  Therefore the win rate, profit factor, drawdown and Sharpe in this report remain backtested results — which is an honest and defensible basis.</a:t>
+              <a:t>•  Therefore the win rate, profit factor, drawdown and Sharpe in this report remain backtested results, which is an honest and defensible basis.</a:t>
             </a:r>
           </a:p>
         </p:txBody>
@@ -34311,7 +34311,7 @@
                 </a:solidFill>
                 <a:latin typeface="Montserrat"/>
               </a:rPr>
-              <a:t>Evidence — The Live Deployment</a:t>
+              <a:t>Evidence: The Live Deployment</a:t>
             </a:r>
           </a:p>
         </p:txBody>
@@ -34866,7 +34866,7 @@
                 </a:solidFill>
                 <a:latin typeface="Montserrat"/>
               </a:rPr>
-              <a:t>•  Two causes dominate — emotional decision-making under pressure, and the impossibility of a human monitoring a 24-hour market consistently.</a:t>
+              <a:t>•  Two causes dominate: emotional decision-making under pressure, and the impossibility of a human monitoring a 24-hour market consistently.</a:t>
             </a:r>
           </a:p>
           <a:p>
@@ -35108,7 +35108,7 @@
                 </a:solidFill>
                 <a:latin typeface="Montserrat"/>
               </a:rPr>
-              <a:t>–  Students and researchers, who gain a fully reproducible evaluation method — every number in this project has a command that regenerates it.</a:t>
+              <a:t>–  Students and researchers, who gain a fully reproducible evaluation method: every number in this project has a command that regenerates it.</a:t>
             </a:r>
           </a:p>
           <a:p>
@@ -35322,7 +35322,7 @@
                 </a:solidFill>
                 <a:latin typeface="Montserrat"/>
               </a:rPr>
-              <a:t>•  This is expressed interest, not revenue — and is described as such.</a:t>
+              <a:t>•  This is expressed interest, not revenue, and is described as such.</a:t>
             </a:r>
           </a:p>
           <a:p>
@@ -35500,7 +35500,7 @@
                 </a:solidFill>
                 <a:latin typeface="Montserrat"/>
               </a:rPr>
-              <a:t>•  A hybrid decision architecture in which a statistical volume filter and a Random Forest must agree, giving every trade both a statistical reason and a model probability — a directly auditable design.</a:t>
+              <a:t>•  A hybrid decision architecture in which a statistical volume filter and a Random Forest must agree, giving every trade both a statistical reason and a model probability, a directly auditable design.</a:t>
             </a:r>
           </a:p>
           <a:p>
@@ -35516,7 +35516,7 @@
                 </a:solidFill>
                 <a:latin typeface="Montserrat"/>
               </a:rPr>
-              <a:t>•  Empirical evidence that triple-barrier labelling — aligning the training target with how a trade actually closes — is more consequential than any indicator tested here, turning both pairs from loss to profit.</a:t>
+              <a:t>•  Empirical evidence that triple-barrier labelling, aligning the training target with how a trade actually closes, is more consequential than any indicator tested here, turning both pairs from loss to profit.</a:t>
             </a:r>
           </a:p>
           <a:p>
@@ -35548,7 +35548,7 @@
                 </a:solidFill>
                 <a:latin typeface="Montserrat"/>
               </a:rPr>
-              <a:t>•  A demonstration that a headline win rate can be produced by exit geometry alone, with a no-skill baseline showing how to separate geometry from genuine skill — a method other studies can reuse.</a:t>
+              <a:t>•  A demonstration that a headline win rate can be produced by exit geometry alone, with a no-skill baseline showing how to separate geometry from genuine skill, a method other studies can reuse.</a:t>
             </a:r>
           </a:p>
           <a:p>
@@ -35790,7 +35790,7 @@
                 </a:solidFill>
                 <a:latin typeface="Montserrat"/>
               </a:rPr>
-              <a:t>–  Chapters 4 and 5 of the report — the measured material and figures already exist in the project documentation.</a:t>
+              <a:t>–  Chapters 4 and 5 of the report: the measured material and figures already exist in the project documentation.</a:t>
             </a:r>
           </a:p>
           <a:p>
@@ -35854,7 +35854,7 @@
                 </a:solidFill>
                 <a:latin typeface="Montserrat"/>
               </a:rPr>
-              <a:t>–  Meta-labelling — a second model deciding whether to accept each primary signal — the standard route to raising precision at fixed risk-reward.</a:t>
+              <a:t>–  Meta-labelling: a second model deciding whether to accept each primary signal, and the standard route to raising precision at fixed risk-reward.</a:t>
             </a:r>
           </a:p>
           <a:p>
@@ -36904,7 +36904,7 @@
                 </a:solidFill>
                 <a:latin typeface="Montserrat"/>
               </a:rPr>
-              <a:t>–  A pure rule system (e.g. moving-average crossover) cannot adapt — it fires the same way in every market condition.</a:t>
+              <a:t>–  A pure rule system (e.g. moving-average crossover) cannot adapt; it fires the same way in every market condition.</a:t>
             </a:r>
           </a:p>
           <a:p>
@@ -36984,7 +36984,7 @@
                 </a:solidFill>
                 <a:latin typeface="Montserrat"/>
               </a:rPr>
-              <a:t>–  Deep learning (LSTM) was reviewed and deliberately rejected — see Literature Review — on grounds of compute cost and opacity, not ignorance.</a:t>
+              <a:t>–  Deep learning (LSTM) was reviewed and deliberately rejected (see Literature Review) on grounds of compute cost and opacity, not ignorance.</a:t>
             </a:r>
           </a:p>
         </p:txBody>
@@ -37178,7 +37178,7 @@
                 </a:solidFill>
                 <a:latin typeface="Montserrat"/>
               </a:rPr>
-              <a:t>•  Published machine-learning trading results are frequently not reproducible — they omit transaction costs, shuffle time-series data (which leaks the future into training), or report only the best run.</a:t>
+              <a:t>•  Published machine-learning trading results are frequently not reproducible: they omit transaction costs, shuffle time-series data (which leaks the future into training), or report only the best run.</a:t>
             </a:r>
           </a:p>
           <a:p>
@@ -37474,7 +37474,7 @@
                 </a:solidFill>
                 <a:latin typeface="Montserrat"/>
               </a:rPr>
-              <a:t>•  ii.  To implement the system end to end — data acquisition, feature engineering, labelling, training, signal generation, risk management and order execution.</a:t>
+              <a:t>•  ii.  To implement the system end to end: data acquisition, feature engineering, labelling, training, signal generation, risk management and order execution.</a:t>
             </a:r>
           </a:p>
           <a:p>
@@ -37882,7 +37882,7 @@
                           </a:solidFill>
                           <a:latin typeface="Montserrat"/>
                         </a:rPr>
-                        <a:t>ADOPTED. The single most effective change made — it turned both currency pairs from a net loss into a net profit.</a:t>
+                        <a:t>ADOPTED. The single most effective change made; it turned both currency pairs from a net loss into a net profit.</a:t>
                       </a:r>
                     </a:p>
                   </a:txBody>
@@ -38502,7 +38502,7 @@
                           </a:solidFill>
                           <a:latin typeface="Montserrat"/>
                         </a:rPr>
-                        <a:t>REVIEWED, NOT ADOPTED — CPU-only hardware, and the opacity conflicts with this project's interpretability goal.</a:t>
+                        <a:t>REVIEWED, NOT ADOPTED: CPU-only hardware, and the opacity conflicts with this project's interpretability goal.</a:t>
                       </a:r>
                     </a:p>
                   </a:txBody>
@@ -38924,7 +38924,7 @@
                 </a:solidFill>
                 <a:latin typeface="Montserrat"/>
               </a:rPr>
-              <a:t>–  Experimental and incremental — build one module at a time, measure every change on BOTH currency pairs, and record the result whether it helped or not.</a:t>
+              <a:t>–  Experimental and incremental: build one module at a time, measure every change on BOTH currency pairs, and record the result whether it helped or not.</a:t>
             </a:r>
           </a:p>
           <a:p>
@@ -38956,7 +38956,7 @@
                 </a:solidFill>
                 <a:latin typeface="Montserrat"/>
               </a:rPr>
-              <a:t>–  Hourly EUR/USD and GBP/USD candles from Yahoo Finance. Because spot FX has no central exchange and reports zero volume, volume is taken from the matching CME currency futures (6E=F, 6B=F) — the standard proxy for institutional activity.</a:t>
+              <a:t>–  Hourly EUR/USD and GBP/USD candles from Yahoo Finance. Because spot FX has no central exchange and reports zero volume, volume is taken from the matching CME currency futures (6E=F, 6B=F), the standard proxy for institutional activity.</a:t>
             </a:r>
           </a:p>
           <a:p>
